--- a/front-pages/02-introduction.pptx
+++ b/front-pages/02-introduction.pptx
@@ -2,13 +2,13 @@
 <file path=ppt/presentation.xml><?xml version="1.0" encoding="utf-8"?>
 <p:presentation xmlns:a="http://schemas.openxmlformats.org/drawingml/2006/main" xmlns:r="http://schemas.openxmlformats.org/officeDocument/2006/relationships" xmlns:p="http://schemas.openxmlformats.org/presentationml/2006/main" saveSubsetFonts="1">
   <p:sldMasterIdLst>
-    <p:sldMasterId id="2147483660" r:id="rId1"/>
+    <p:sldMasterId id="2147483768" r:id="rId1"/>
   </p:sldMasterIdLst>
   <p:notesMasterIdLst>
     <p:notesMasterId r:id="rId3"/>
   </p:notesMasterIdLst>
   <p:sldIdLst>
-    <p:sldId id="258" r:id="rId2"/>
+    <p:sldId id="595" r:id="rId2"/>
   </p:sldIdLst>
   <p:sldSz cx="6858000" cy="9906000" type="A4"/>
   <p:notesSz cx="6797675" cy="9926638"/>
@@ -197,7 +197,7 @@
           <a:p>
             <a:fld id="{CC5A8F6C-B07C-452E-B339-02239878CD78}" type="datetimeFigureOut">
               <a:rPr lang="en-US" smtClean="0"/>
-              <a:t>10/27/2026</a:t>
+              <a:t>10/28/2026</a:t>
             </a:fld>
             <a:endParaRPr lang="en-US"/>
           </a:p>
@@ -595,7 +595,7 @@
           <a:p>
             <a:fld id="{FD7949EE-9881-4002-A5D2-5C603941A9EE}" type="datetime1">
               <a:rPr lang="en-US" smtClean="0"/>
-              <a:t>10/27/2026</a:t>
+              <a:t>10/28/2026</a:t>
             </a:fld>
             <a:endParaRPr lang="en-US"/>
           </a:p>
@@ -646,7 +646,7 @@
     </p:spTree>
     <p:extLst>
       <p:ext uri="{BB962C8B-B14F-4D97-AF65-F5344CB8AC3E}">
-        <p14:creationId xmlns:p14="http://schemas.microsoft.com/office/powerpoint/2010/main" val="3628540520"/>
+        <p14:creationId xmlns:p14="http://schemas.microsoft.com/office/powerpoint/2010/main" val="3048267991"/>
       </p:ext>
     </p:extLst>
   </p:cSld>
@@ -765,7 +765,7 @@
           <a:p>
             <a:fld id="{AA6D735C-9495-42D3-9A57-B69F6B441082}" type="datetime1">
               <a:rPr lang="en-US" smtClean="0"/>
-              <a:t>10/27/2026</a:t>
+              <a:t>10/28/2026</a:t>
             </a:fld>
             <a:endParaRPr lang="en-US"/>
           </a:p>
@@ -816,7 +816,7 @@
     </p:spTree>
     <p:extLst>
       <p:ext uri="{BB962C8B-B14F-4D97-AF65-F5344CB8AC3E}">
-        <p14:creationId xmlns:p14="http://schemas.microsoft.com/office/powerpoint/2010/main" val="2039328666"/>
+        <p14:creationId xmlns:p14="http://schemas.microsoft.com/office/powerpoint/2010/main" val="1795313768"/>
       </p:ext>
     </p:extLst>
   </p:cSld>
@@ -945,7 +945,7 @@
           <a:p>
             <a:fld id="{A59F4679-FE80-435C-9BF4-7126CA01D8FE}" type="datetime1">
               <a:rPr lang="en-US" smtClean="0"/>
-              <a:t>10/27/2026</a:t>
+              <a:t>10/28/2026</a:t>
             </a:fld>
             <a:endParaRPr lang="en-US"/>
           </a:p>
@@ -996,7 +996,7 @@
     </p:spTree>
     <p:extLst>
       <p:ext uri="{BB962C8B-B14F-4D97-AF65-F5344CB8AC3E}">
-        <p14:creationId xmlns:p14="http://schemas.microsoft.com/office/powerpoint/2010/main" val="3994105573"/>
+        <p14:creationId xmlns:p14="http://schemas.microsoft.com/office/powerpoint/2010/main" val="3683127082"/>
       </p:ext>
     </p:extLst>
   </p:cSld>
@@ -1115,7 +1115,7 @@
           <a:p>
             <a:fld id="{E4AD393A-51C8-4873-AB5B-33A9CA72457B}" type="datetime1">
               <a:rPr lang="en-US" smtClean="0"/>
-              <a:t>10/27/2026</a:t>
+              <a:t>10/28/2026</a:t>
             </a:fld>
             <a:endParaRPr lang="en-US"/>
           </a:p>
@@ -1166,7 +1166,7 @@
     </p:spTree>
     <p:extLst>
       <p:ext uri="{BB962C8B-B14F-4D97-AF65-F5344CB8AC3E}">
-        <p14:creationId xmlns:p14="http://schemas.microsoft.com/office/powerpoint/2010/main" val="1007937542"/>
+        <p14:creationId xmlns:p14="http://schemas.microsoft.com/office/powerpoint/2010/main" val="2131353060"/>
       </p:ext>
     </p:extLst>
   </p:cSld>
@@ -1361,7 +1361,7 @@
           <a:p>
             <a:fld id="{C5ED32DC-3138-49D5-A762-35EF2E7B5708}" type="datetime1">
               <a:rPr lang="en-US" smtClean="0"/>
-              <a:t>10/27/2026</a:t>
+              <a:t>10/28/2026</a:t>
             </a:fld>
             <a:endParaRPr lang="en-US"/>
           </a:p>
@@ -1412,7 +1412,7 @@
     </p:spTree>
     <p:extLst>
       <p:ext uri="{BB962C8B-B14F-4D97-AF65-F5344CB8AC3E}">
-        <p14:creationId xmlns:p14="http://schemas.microsoft.com/office/powerpoint/2010/main" val="2031474683"/>
+        <p14:creationId xmlns:p14="http://schemas.microsoft.com/office/powerpoint/2010/main" val="1390072416"/>
       </p:ext>
     </p:extLst>
   </p:cSld>
@@ -1593,7 +1593,7 @@
           <a:p>
             <a:fld id="{4434DCFC-A56F-426C-B9EF-CD0CDC7D69F1}" type="datetime1">
               <a:rPr lang="en-US" smtClean="0"/>
-              <a:t>10/27/2026</a:t>
+              <a:t>10/28/2026</a:t>
             </a:fld>
             <a:endParaRPr lang="en-US"/>
           </a:p>
@@ -1644,7 +1644,7 @@
     </p:spTree>
     <p:extLst>
       <p:ext uri="{BB962C8B-B14F-4D97-AF65-F5344CB8AC3E}">
-        <p14:creationId xmlns:p14="http://schemas.microsoft.com/office/powerpoint/2010/main" val="2485527161"/>
+        <p14:creationId xmlns:p14="http://schemas.microsoft.com/office/powerpoint/2010/main" val="1554083428"/>
       </p:ext>
     </p:extLst>
   </p:cSld>
@@ -1960,7 +1960,7 @@
           <a:p>
             <a:fld id="{D54E70D6-12C6-4DE5-9A5D-29B6EE417C39}" type="datetime1">
               <a:rPr lang="en-US" smtClean="0"/>
-              <a:t>10/27/2026</a:t>
+              <a:t>10/28/2026</a:t>
             </a:fld>
             <a:endParaRPr lang="en-US"/>
           </a:p>
@@ -2011,7 +2011,7 @@
     </p:spTree>
     <p:extLst>
       <p:ext uri="{BB962C8B-B14F-4D97-AF65-F5344CB8AC3E}">
-        <p14:creationId xmlns:p14="http://schemas.microsoft.com/office/powerpoint/2010/main" val="3360494259"/>
+        <p14:creationId xmlns:p14="http://schemas.microsoft.com/office/powerpoint/2010/main" val="194654899"/>
       </p:ext>
     </p:extLst>
   </p:cSld>
@@ -2078,7 +2078,7 @@
           <a:p>
             <a:fld id="{F40E3A64-FA3B-4E33-B42D-2315F535535C}" type="datetime1">
               <a:rPr lang="en-US" smtClean="0"/>
-              <a:t>10/27/2026</a:t>
+              <a:t>10/28/2026</a:t>
             </a:fld>
             <a:endParaRPr lang="en-US"/>
           </a:p>
@@ -2129,7 +2129,7 @@
     </p:spTree>
     <p:extLst>
       <p:ext uri="{BB962C8B-B14F-4D97-AF65-F5344CB8AC3E}">
-        <p14:creationId xmlns:p14="http://schemas.microsoft.com/office/powerpoint/2010/main" val="2551148443"/>
+        <p14:creationId xmlns:p14="http://schemas.microsoft.com/office/powerpoint/2010/main" val="4254403855"/>
       </p:ext>
     </p:extLst>
   </p:cSld>
@@ -2173,7 +2173,7 @@
           <a:p>
             <a:fld id="{B58DA539-685E-4880-A468-8EF8C4AD42F8}" type="datetime1">
               <a:rPr lang="en-US" smtClean="0"/>
-              <a:t>10/27/2026</a:t>
+              <a:t>10/28/2026</a:t>
             </a:fld>
             <a:endParaRPr lang="en-US"/>
           </a:p>
@@ -2224,7 +2224,7 @@
     </p:spTree>
     <p:extLst>
       <p:ext uri="{BB962C8B-B14F-4D97-AF65-F5344CB8AC3E}">
-        <p14:creationId xmlns:p14="http://schemas.microsoft.com/office/powerpoint/2010/main" val="1488637284"/>
+        <p14:creationId xmlns:p14="http://schemas.microsoft.com/office/powerpoint/2010/main" val="4175121375"/>
       </p:ext>
     </p:extLst>
   </p:cSld>
@@ -2450,7 +2450,7 @@
           <a:p>
             <a:fld id="{F88FD366-2480-4FDC-A6F7-D357B93DAA4F}" type="datetime1">
               <a:rPr lang="en-US" smtClean="0"/>
-              <a:t>10/27/2026</a:t>
+              <a:t>10/28/2026</a:t>
             </a:fld>
             <a:endParaRPr lang="en-US"/>
           </a:p>
@@ -2501,7 +2501,7 @@
     </p:spTree>
     <p:extLst>
       <p:ext uri="{BB962C8B-B14F-4D97-AF65-F5344CB8AC3E}">
-        <p14:creationId xmlns:p14="http://schemas.microsoft.com/office/powerpoint/2010/main" val="1395363762"/>
+        <p14:creationId xmlns:p14="http://schemas.microsoft.com/office/powerpoint/2010/main" val="2967437924"/>
       </p:ext>
     </p:extLst>
   </p:cSld>
@@ -2703,7 +2703,7 @@
           <a:p>
             <a:fld id="{8C470449-18DB-4FF7-8D7E-CF4A040C7D57}" type="datetime1">
               <a:rPr lang="en-US" smtClean="0"/>
-              <a:t>10/27/2026</a:t>
+              <a:t>10/28/2026</a:t>
             </a:fld>
             <a:endParaRPr lang="en-US"/>
           </a:p>
@@ -2754,7 +2754,7 @@
     </p:spTree>
     <p:extLst>
       <p:ext uri="{BB962C8B-B14F-4D97-AF65-F5344CB8AC3E}">
-        <p14:creationId xmlns:p14="http://schemas.microsoft.com/office/powerpoint/2010/main" val="1535732794"/>
+        <p14:creationId xmlns:p14="http://schemas.microsoft.com/office/powerpoint/2010/main" val="1801370091"/>
       </p:ext>
     </p:extLst>
   </p:cSld>
@@ -2765,7 +2765,7 @@
 </file>
 
 <file path=ppt/slideMasters/slideMaster1.xml><?xml version="1.0" encoding="utf-8"?>
-<p:sldMaster xmlns:a="http://schemas.openxmlformats.org/drawingml/2006/main" xmlns:r="http://schemas.openxmlformats.org/officeDocument/2006/relationships" xmlns:p="http://schemas.openxmlformats.org/presentationml/2006/main">
+<p:sldMaster xmlns:a="http://schemas.openxmlformats.org/drawingml/2006/main" xmlns:r="http://schemas.openxmlformats.org/officeDocument/2006/relationships" xmlns:p="http://schemas.openxmlformats.org/presentationml/2006/main" preserve="1">
   <p:cSld>
     <p:bg>
       <p:bgRef idx="1001">
@@ -2916,7 +2916,7 @@
           <a:p>
             <a:fld id="{43F121EA-D16B-4B7B-A7AE-6CA1296CE191}" type="datetime1">
               <a:rPr lang="en-US" smtClean="0"/>
-              <a:t>10/27/2026</a:t>
+              <a:t>10/28/2026</a:t>
             </a:fld>
             <a:endParaRPr lang="en-US"/>
           </a:p>
@@ -3003,23 +3003,23 @@
     </p:spTree>
     <p:extLst>
       <p:ext uri="{BB962C8B-B14F-4D97-AF65-F5344CB8AC3E}">
-        <p14:creationId xmlns:p14="http://schemas.microsoft.com/office/powerpoint/2010/main" val="3595107264"/>
+        <p14:creationId xmlns:p14="http://schemas.microsoft.com/office/powerpoint/2010/main" val="1862752307"/>
       </p:ext>
     </p:extLst>
   </p:cSld>
   <p:clrMap bg1="lt1" tx1="dk1" bg2="lt2" tx2="dk2" accent1="accent1" accent2="accent2" accent3="accent3" accent4="accent4" accent5="accent5" accent6="accent6" hlink="hlink" folHlink="folHlink"/>
   <p:sldLayoutIdLst>
-    <p:sldLayoutId id="2147483661" r:id="rId1"/>
-    <p:sldLayoutId id="2147483662" r:id="rId2"/>
-    <p:sldLayoutId id="2147483663" r:id="rId3"/>
-    <p:sldLayoutId id="2147483664" r:id="rId4"/>
-    <p:sldLayoutId id="2147483665" r:id="rId5"/>
-    <p:sldLayoutId id="2147483666" r:id="rId6"/>
-    <p:sldLayoutId id="2147483667" r:id="rId7"/>
-    <p:sldLayoutId id="2147483668" r:id="rId8"/>
-    <p:sldLayoutId id="2147483669" r:id="rId9"/>
-    <p:sldLayoutId id="2147483670" r:id="rId10"/>
-    <p:sldLayoutId id="2147483671" r:id="rId11"/>
+    <p:sldLayoutId id="2147483769" r:id="rId1"/>
+    <p:sldLayoutId id="2147483770" r:id="rId2"/>
+    <p:sldLayoutId id="2147483771" r:id="rId3"/>
+    <p:sldLayoutId id="2147483772" r:id="rId4"/>
+    <p:sldLayoutId id="2147483773" r:id="rId5"/>
+    <p:sldLayoutId id="2147483774" r:id="rId6"/>
+    <p:sldLayoutId id="2147483775" r:id="rId7"/>
+    <p:sldLayoutId id="2147483776" r:id="rId8"/>
+    <p:sldLayoutId id="2147483777" r:id="rId9"/>
+    <p:sldLayoutId id="2147483778" r:id="rId10"/>
+    <p:sldLayoutId id="2147483779" r:id="rId11"/>
   </p:sldLayoutIdLst>
   <p:hf hdr="0" ftr="0" dt="0"/>
   <p:txStyles>
@@ -3616,48 +3616,6 @@
       </p:sp>
       <p:sp>
         <p:nvSpPr>
-          <p:cNvPr id="2" name="Introduction">
-            <a:extLst>
-              <a:ext uri="{FF2B5EF4-FFF2-40B4-BE49-F238E27FC236}">
-                <a16:creationId xmlns:a16="http://schemas.microsoft.com/office/drawing/2014/main" id="{6C1E2F2D-9AD9-E0AD-01C1-7460903CAB7A}"/>
-              </a:ext>
-            </a:extLst>
-          </p:cNvPr>
-          <p:cNvSpPr/>
-          <p:nvPr/>
-        </p:nvSpPr>
-        <p:spPr>
-          <a:xfrm>
-            <a:off x="288290" y="1244600"/>
-            <a:ext cx="6426200" cy="1099019"/>
-          </a:xfrm>
-          <a:prstGeom prst="rect">
-            <a:avLst/>
-          </a:prstGeom>
-          <a:noFill/>
-          <a:ln/>
-        </p:spPr>
-        <p:txBody>
-          <a:bodyPr wrap="square" lIns="0" tIns="0" rIns="0" bIns="0" rtlCol="0" anchor="t">
-            <a:spAutoFit/>
-          </a:bodyPr>
-          <a:lstStyle/>
-          <a:p>
-            <a:pPr>
-              <a:lnSpc>
-                <a:spcPct val="104000"/>
-              </a:lnSpc>
-            </a:pPr>
-            <a:r>
-              <a:rPr lang="en-US" sz="1150"/>
-              <a:t>The section for Materials and Surface Engineering has expertise in many aspects of materials science and engineering and covers disciplines as materials synthesis, materials solutions, materials characterization, and materials performance. The section teaches and researches in topics spanning from fundamental materials science to innovative materials engineering solutions. The activities include advanced experimental synthesis and characterization techniques as well as modelling and simulation to predict material behavior and design new solutions.</a:t>
-            </a:r>
-            <a:endParaRPr lang="en-US" sz="1150" dirty="0"/>
-          </a:p>
-        </p:txBody>
-      </p:sp>
-      <p:sp>
-        <p:nvSpPr>
           <p:cNvPr id="5" name="Themes heading">
             <a:extLst>
               <a:ext uri="{FF2B5EF4-FFF2-40B4-BE49-F238E27FC236}">
@@ -3670,7 +3628,7 @@
         </p:nvSpPr>
         <p:spPr>
           <a:xfrm>
-            <a:off x="288290" y="2648419"/>
+            <a:off x="288290" y="1124337"/>
             <a:ext cx="6426200" cy="132344"/>
           </a:xfrm>
           <a:prstGeom prst="rect">
@@ -3720,7 +3678,7 @@
         </p:nvSpPr>
         <p:spPr>
           <a:xfrm>
-            <a:off x="288290" y="2907763"/>
+            <a:off x="288290" y="1383681"/>
             <a:ext cx="6426200" cy="176972"/>
           </a:xfrm>
           <a:prstGeom prst="rect">
@@ -3770,7 +3728,7 @@
         </p:nvSpPr>
         <p:spPr>
           <a:xfrm>
-            <a:off x="288290" y="3110135"/>
+            <a:off x="288290" y="1586053"/>
             <a:ext cx="6426200" cy="499496"/>
           </a:xfrm>
           <a:prstGeom prst="rect">
@@ -3785,7 +3743,7 @@
           </a:bodyPr>
           <a:lstStyle/>
           <a:p>
-            <a:pPr>
+            <a:pPr algn="just">
               <a:lnSpc>
                 <a:spcPct val="104000"/>
               </a:lnSpc>
@@ -3812,7 +3770,7 @@
         </p:nvSpPr>
         <p:spPr>
           <a:xfrm>
-            <a:off x="288290" y="3812831"/>
+            <a:off x="288290" y="2288749"/>
             <a:ext cx="6426200" cy="176972"/>
           </a:xfrm>
           <a:prstGeom prst="rect">
@@ -3862,7 +3820,7 @@
         </p:nvSpPr>
         <p:spPr>
           <a:xfrm>
-            <a:off x="288290" y="4015203"/>
+            <a:off x="288290" y="2491121"/>
             <a:ext cx="6426200" cy="667555"/>
           </a:xfrm>
           <a:prstGeom prst="rect">
@@ -3877,16 +3835,15 @@
           </a:bodyPr>
           <a:lstStyle/>
           <a:p>
-            <a:pPr>
+            <a:pPr algn="just">
               <a:lnSpc>
                 <a:spcPct val="104000"/>
               </a:lnSpc>
             </a:pPr>
             <a:r>
-              <a:rPr lang="en-US" sz="1050"/>
+              <a:rPr lang="en-US" sz="1050" dirty="0"/>
               <a:t>Materials microstructure evolution during processing by e.g. thermal treatments or plastic deformation as well as during application lies at the very essence of understanding the relations between process parameters, properties and performance. Understanding the microstructure evolution and phase transformations in materials forms the basis for materials modelling activities.</a:t>
             </a:r>
-            <a:endParaRPr lang="en-US" sz="1050" dirty="0"/>
           </a:p>
         </p:txBody>
       </p:sp>
@@ -3904,7 +3861,7 @@
         </p:nvSpPr>
         <p:spPr>
           <a:xfrm>
-            <a:off x="288290" y="4885958"/>
+            <a:off x="288290" y="3361876"/>
             <a:ext cx="6426200" cy="176972"/>
           </a:xfrm>
           <a:prstGeom prst="rect">
@@ -3926,7 +3883,7 @@
               <a:buNone/>
             </a:pPr>
             <a:r>
-              <a:rPr lang="en-US" sz="1150" b="1">
+              <a:rPr lang="en-US" sz="1150" b="1" dirty="0">
                 <a:solidFill>
                   <a:srgbClr val="5D666B"/>
                 </a:solidFill>
@@ -3954,8 +3911,8 @@
         </p:nvSpPr>
         <p:spPr>
           <a:xfrm>
-            <a:off x="288290" y="5088330"/>
-            <a:ext cx="6426200" cy="667555"/>
+            <a:off x="288290" y="3564248"/>
+            <a:ext cx="6426200" cy="499496"/>
           </a:xfrm>
           <a:prstGeom prst="rect">
             <a:avLst/>
@@ -3969,16 +3926,15 @@
           </a:bodyPr>
           <a:lstStyle/>
           <a:p>
-            <a:pPr>
+            <a:pPr algn="just">
               <a:lnSpc>
                 <a:spcPct val="104000"/>
               </a:lnSpc>
             </a:pPr>
             <a:r>
-              <a:rPr lang="en-US" sz="1050"/>
-              <a:t>Research in materials performance and materials degradation is focused on corrosion, tribology and high temperature applications, i.e. the chemical, mechanical and thermal interaction of materials with the environment. The degradation mechanisms are investigated and the obtained understanding is explored to predict the life expectancy and design improved materials solutions.</a:t>
-            </a:r>
-            <a:endParaRPr lang="en-US" sz="1050" dirty="0"/>
+              <a:rPr lang="en-US" sz="1050" dirty="0"/>
+              <a:t>Research in materials performance and materials degradation is focused on corrosion, tribology and high temperature applications, i.e. the chemical, mechanical and thermal interaction of materials with the environment. </a:t>
+            </a:r>
           </a:p>
         </p:txBody>
       </p:sp>
@@ -3996,8 +3952,8 @@
         </p:nvSpPr>
         <p:spPr>
           <a:xfrm>
-            <a:off x="288290" y="5984485"/>
-            <a:ext cx="6426200" cy="331437"/>
+            <a:off x="288290" y="4155931"/>
+            <a:ext cx="6426200" cy="3393237"/>
           </a:xfrm>
           <a:prstGeom prst="rect">
             <a:avLst/>
@@ -4011,16 +3967,107 @@
           </a:bodyPr>
           <a:lstStyle/>
           <a:p>
-            <a:pPr>
-              <a:lnSpc>
-                <a:spcPct val="104000"/>
-              </a:lnSpc>
+            <a:pPr algn="just"/>
+            <a:r>
+              <a:rPr lang="en-US" sz="1050" dirty="0"/>
+              <a:t>Currently, we focus on </a:t>
+            </a:r>
+            <a:r>
+              <a:rPr lang="en-US" sz="1050" b="1" dirty="0"/>
+              <a:t>materials for sustainable energy, construction, electronics and medical applications</a:t>
+            </a:r>
+            <a:r>
+              <a:rPr lang="en-US" sz="1050" dirty="0"/>
+              <a:t>, supported by materials modelling and sustainable processing. Our research covers:</a:t>
+            </a:r>
+          </a:p>
+          <a:p>
+            <a:pPr algn="just"/>
+            <a:endParaRPr lang="en-US" sz="1050" dirty="0"/>
+          </a:p>
+          <a:p>
+            <a:pPr marL="171450" lvl="0" indent="-171450" algn="just">
+              <a:buFont typeface="Arial" panose="020B0604020202020204" pitchFamily="34" charset="0"/>
+              <a:buChar char="•"/>
             </a:pPr>
             <a:r>
-              <a:rPr lang="en-US" sz="1050" i="1"/>
-              <a:t>Currently, we focus on materials for (sustainable) energy applications and materials in medical applications. We have a broad international network of collaboration within academia and industry.</a:t>
-            </a:r>
-            <a:endParaRPr lang="en-US" sz="1050" i="1" dirty="0"/>
+              <a:rPr lang="en-US" sz="1050" b="1" dirty="0"/>
+              <a:t>Energy generation:</a:t>
+            </a:r>
+            <a:r>
+              <a:rPr lang="en-US" sz="1050" dirty="0"/>
+              <a:t> Materials with high-temperature stability and radiation resistance for future fourth-generation fission and fusion reactors, alongside corrosion-resistant materials for Power-to-X technologies and green fuel combustion in aqueous, gaseous and high-temperature environments.</a:t>
+            </a:r>
+          </a:p>
+          <a:p>
+            <a:pPr marL="171450" lvl="0" indent="-171450" algn="just">
+              <a:buFont typeface="Arial" panose="020B0604020202020204" pitchFamily="34" charset="0"/>
+              <a:buChar char="•"/>
+            </a:pPr>
+            <a:r>
+              <a:rPr lang="en-US" sz="1050" b="1" dirty="0"/>
+              <a:t>Energy storage:</a:t>
+            </a:r>
+            <a:r>
+              <a:rPr lang="en-US" sz="1050" dirty="0"/>
+              <a:t> Durable materials for thermal energy storage in molten salts and materials supporting high charge-storage capacity and fire safety in electrical energy storage.</a:t>
+            </a:r>
+          </a:p>
+          <a:p>
+            <a:pPr marL="171450" lvl="0" indent="-171450" algn="just">
+              <a:buFont typeface="Arial" panose="020B0604020202020204" pitchFamily="34" charset="0"/>
+              <a:buChar char="•"/>
+            </a:pPr>
+            <a:r>
+              <a:rPr lang="en-US" sz="1050" b="1" dirty="0"/>
+              <a:t>Sustainable construction:</a:t>
+            </a:r>
+            <a:r>
+              <a:rPr lang="en-US" sz="1050" dirty="0"/>
+              <a:t> Cement-free building materials derived from living materials, industrial waste and by-products to reduce CO₂ emissions, energy consumption and costs, with integrated thermal and energy storage functions.</a:t>
+            </a:r>
+          </a:p>
+          <a:p>
+            <a:pPr marL="171450" lvl="0" indent="-171450" algn="just">
+              <a:buFont typeface="Arial" panose="020B0604020202020204" pitchFamily="34" charset="0"/>
+              <a:buChar char="•"/>
+            </a:pPr>
+            <a:r>
+              <a:rPr lang="en-US" sz="1050" b="1" dirty="0"/>
+              <a:t>Electronics reliability:</a:t>
+            </a:r>
+            <a:r>
+              <a:rPr lang="en-US" sz="1050" dirty="0"/>
+              <a:t> Design and testing of electronics, including high-voltage power electronics, to ensure corrosion robustness and reliability under humidity and other harsh conditions associated with electrification.</a:t>
+            </a:r>
+          </a:p>
+          <a:p>
+            <a:pPr marL="171450" lvl="0" indent="-171450" algn="just">
+              <a:buFont typeface="Arial" panose="020B0604020202020204" pitchFamily="34" charset="0"/>
+              <a:buChar char="•"/>
+            </a:pPr>
+            <a:r>
+              <a:rPr lang="en-US" sz="1050" b="1" dirty="0"/>
+              <a:t>Materials modelling and simulation:</a:t>
+            </a:r>
+            <a:r>
+              <a:rPr lang="en-US" sz="1050" dirty="0"/>
+              <a:t> Thermodynamic and kinetic modelling, simulations of microstructural evolution, electrochemical processes and micromechanics, and AI-assisted feature identification and risk prediction.</a:t>
+            </a:r>
+          </a:p>
+          <a:p>
+            <a:pPr marL="171450" lvl="0" indent="-171450" algn="just">
+              <a:buFont typeface="Arial" panose="020B0604020202020204" pitchFamily="34" charset="0"/>
+              <a:buChar char="•"/>
+            </a:pPr>
+            <a:r>
+              <a:rPr lang="en-US" sz="1050" b="1" dirty="0"/>
+              <a:t>Sustainable synthesis, use and recycling:</a:t>
+            </a:r>
+            <a:r>
+              <a:rPr lang="en-US" sz="1050" dirty="0"/>
+              <a:t> PFAS-free corrosion protection, chromium-free wear-resistant coatings, durable materials for CO₂ transport and storage, and assessment of recycled material properties. We also investigate CO₂-neutral metal production, including green steel, and stronger metals less prone to mechanical failure to conserve raw materials and energy.</a:t>
+            </a:r>
           </a:p>
         </p:txBody>
       </p:sp>
@@ -4038,7 +4085,7 @@
         </p:nvSpPr>
         <p:spPr>
           <a:xfrm>
-            <a:off x="288290" y="6595322"/>
+            <a:off x="288290" y="7607002"/>
             <a:ext cx="6426200" cy="0"/>
           </a:xfrm>
           <a:prstGeom prst="line">
@@ -4074,7 +4121,7 @@
         </p:nvSpPr>
         <p:spPr>
           <a:xfrm>
-            <a:off x="288290" y="6849322"/>
+            <a:off x="288290" y="7689790"/>
             <a:ext cx="6426200" cy="132344"/>
           </a:xfrm>
           <a:prstGeom prst="rect">
@@ -4096,7 +4143,7 @@
               <a:buNone/>
             </a:pPr>
             <a:r>
-              <a:rPr lang="en-US" sz="860" b="1" kern="0" cap="all" spc="120">
+              <a:rPr lang="en-US" sz="860" b="1" kern="0" cap="all" spc="120" dirty="0">
                 <a:solidFill>
                   <a:srgbClr val="A30018"/>
                 </a:solidFill>
@@ -4124,7 +4171,7 @@
         </p:nvSpPr>
         <p:spPr>
           <a:xfrm>
-            <a:off x="288290" y="7108666"/>
+            <a:off x="288290" y="7918654"/>
             <a:ext cx="2040467" cy="161583"/>
           </a:xfrm>
           <a:prstGeom prst="rect">
@@ -4174,7 +4221,7 @@
         </p:nvSpPr>
         <p:spPr>
           <a:xfrm>
-            <a:off x="288290" y="7244849"/>
+            <a:off x="288290" y="8054837"/>
             <a:ext cx="2040467" cy="138499"/>
           </a:xfrm>
           <a:prstGeom prst="rect">
@@ -4222,7 +4269,7 @@
         </p:nvSpPr>
         <p:spPr>
           <a:xfrm>
-            <a:off x="288290" y="7357949"/>
+            <a:off x="288290" y="8167937"/>
             <a:ext cx="2040467" cy="146194"/>
           </a:xfrm>
           <a:prstGeom prst="rect">
@@ -4283,7 +4330,7 @@
         </p:nvSpPr>
         <p:spPr>
           <a:xfrm>
-            <a:off x="2430357" y="7108666"/>
+            <a:off x="2430357" y="7918654"/>
             <a:ext cx="2040467" cy="161583"/>
           </a:xfrm>
           <a:prstGeom prst="rect">
@@ -4333,7 +4380,7 @@
         </p:nvSpPr>
         <p:spPr>
           <a:xfrm>
-            <a:off x="2430357" y="7244849"/>
+            <a:off x="2430357" y="8054837"/>
             <a:ext cx="2040467" cy="146194"/>
           </a:xfrm>
           <a:prstGeom prst="rect">
@@ -4394,7 +4441,7 @@
         </p:nvSpPr>
         <p:spPr>
           <a:xfrm>
-            <a:off x="4572423" y="7108666"/>
+            <a:off x="4572423" y="7918654"/>
             <a:ext cx="2040467" cy="161583"/>
           </a:xfrm>
           <a:prstGeom prst="rect">
@@ -4444,7 +4491,7 @@
         </p:nvSpPr>
         <p:spPr>
           <a:xfrm>
-            <a:off x="4572423" y="7244849"/>
+            <a:off x="4572423" y="8054837"/>
             <a:ext cx="2040467" cy="146194"/>
           </a:xfrm>
           <a:prstGeom prst="rect">
@@ -4505,7 +4552,7 @@
         </p:nvSpPr>
         <p:spPr>
           <a:xfrm>
-            <a:off x="288290" y="7669244"/>
+            <a:off x="288290" y="8395412"/>
             <a:ext cx="2040467" cy="161583"/>
           </a:xfrm>
           <a:prstGeom prst="rect">
@@ -4555,7 +4602,7 @@
         </p:nvSpPr>
         <p:spPr>
           <a:xfrm>
-            <a:off x="288290" y="7805427"/>
+            <a:off x="288290" y="8531595"/>
             <a:ext cx="2040467" cy="146194"/>
           </a:xfrm>
           <a:prstGeom prst="rect">
@@ -4616,7 +4663,7 @@
         </p:nvSpPr>
         <p:spPr>
           <a:xfrm>
-            <a:off x="2430357" y="7669244"/>
+            <a:off x="2430357" y="8395412"/>
             <a:ext cx="2040467" cy="161583"/>
           </a:xfrm>
           <a:prstGeom prst="rect">
@@ -4666,7 +4713,7 @@
         </p:nvSpPr>
         <p:spPr>
           <a:xfrm>
-            <a:off x="2430357" y="7805427"/>
+            <a:off x="2430357" y="8531595"/>
             <a:ext cx="2040467" cy="146194"/>
           </a:xfrm>
           <a:prstGeom prst="rect">
@@ -4727,7 +4774,7 @@
         </p:nvSpPr>
         <p:spPr>
           <a:xfrm>
-            <a:off x="4572423" y="7669244"/>
+            <a:off x="4572423" y="8395412"/>
             <a:ext cx="2040467" cy="161583"/>
           </a:xfrm>
           <a:prstGeom prst="rect">
@@ -4777,7 +4824,7 @@
         </p:nvSpPr>
         <p:spPr>
           <a:xfrm>
-            <a:off x="4572423" y="7805427"/>
+            <a:off x="4572423" y="8531595"/>
             <a:ext cx="2040467" cy="146194"/>
           </a:xfrm>
           <a:prstGeom prst="rect">
@@ -4838,7 +4885,7 @@
         </p:nvSpPr>
         <p:spPr>
           <a:xfrm>
-            <a:off x="288290" y="8116721"/>
+            <a:off x="288290" y="8714231"/>
             <a:ext cx="2040467" cy="161583"/>
           </a:xfrm>
           <a:prstGeom prst="rect">
@@ -4888,7 +4935,7 @@
         </p:nvSpPr>
         <p:spPr>
           <a:xfrm>
-            <a:off x="288290" y="8252904"/>
+            <a:off x="288290" y="8850414"/>
             <a:ext cx="2040467" cy="146194"/>
           </a:xfrm>
           <a:prstGeom prst="rect">
@@ -4949,7 +4996,7 @@
         </p:nvSpPr>
         <p:spPr>
           <a:xfrm>
-            <a:off x="2430357" y="8116721"/>
+            <a:off x="2430357" y="8714231"/>
             <a:ext cx="2040467" cy="161583"/>
           </a:xfrm>
           <a:prstGeom prst="rect">
@@ -4999,7 +5046,7 @@
         </p:nvSpPr>
         <p:spPr>
           <a:xfrm>
-            <a:off x="2430357" y="8252904"/>
+            <a:off x="2430357" y="8850414"/>
             <a:ext cx="2040467" cy="146194"/>
           </a:xfrm>
           <a:prstGeom prst="rect">
@@ -5060,7 +5107,7 @@
         </p:nvSpPr>
         <p:spPr>
           <a:xfrm>
-            <a:off x="4572423" y="8116721"/>
+            <a:off x="4572423" y="8714231"/>
             <a:ext cx="2040467" cy="161583"/>
           </a:xfrm>
           <a:prstGeom prst="rect">
@@ -5082,7 +5129,7 @@
               <a:buNone/>
             </a:pPr>
             <a:r>
-              <a:rPr lang="en-US" sz="1050" b="1">
+              <a:rPr lang="en-US" sz="1050" b="1" dirty="0">
                 <a:solidFill>
                   <a:srgbClr val="5D666B"/>
                 </a:solidFill>
@@ -5110,7 +5157,7 @@
         </p:nvSpPr>
         <p:spPr>
           <a:xfrm>
-            <a:off x="4572423" y="8252904"/>
+            <a:off x="4572423" y="8850414"/>
             <a:ext cx="2040467" cy="146194"/>
           </a:xfrm>
           <a:prstGeom prst="rect">
@@ -5171,7 +5218,7 @@
         </p:nvSpPr>
         <p:spPr>
           <a:xfrm>
-            <a:off x="288290" y="8564198"/>
+            <a:off x="288290" y="9061766"/>
             <a:ext cx="2040467" cy="161583"/>
           </a:xfrm>
           <a:prstGeom prst="rect">
@@ -5221,7 +5268,7 @@
         </p:nvSpPr>
         <p:spPr>
           <a:xfrm>
-            <a:off x="288290" y="8700381"/>
+            <a:off x="288290" y="9197949"/>
             <a:ext cx="2040467" cy="146194"/>
           </a:xfrm>
           <a:prstGeom prst="rect">
@@ -5282,7 +5329,7 @@
         </p:nvSpPr>
         <p:spPr>
           <a:xfrm>
-            <a:off x="2430357" y="8564198"/>
+            <a:off x="2430357" y="9061766"/>
             <a:ext cx="2040467" cy="161583"/>
           </a:xfrm>
           <a:prstGeom prst="rect">
@@ -5332,7 +5379,7 @@
         </p:nvSpPr>
         <p:spPr>
           <a:xfrm>
-            <a:off x="2430357" y="8700381"/>
+            <a:off x="2430357" y="9197949"/>
             <a:ext cx="2040467" cy="146194"/>
           </a:xfrm>
           <a:prstGeom prst="rect">
@@ -5393,7 +5440,7 @@
         </p:nvSpPr>
         <p:spPr>
           <a:xfrm>
-            <a:off x="4572423" y="8564198"/>
+            <a:off x="4572423" y="9061766"/>
             <a:ext cx="2040467" cy="161583"/>
           </a:xfrm>
           <a:prstGeom prst="rect">
@@ -5443,7 +5490,7 @@
         </p:nvSpPr>
         <p:spPr>
           <a:xfrm>
-            <a:off x="4572423" y="8700381"/>
+            <a:off x="4572423" y="9197949"/>
             <a:ext cx="2040467" cy="146194"/>
           </a:xfrm>
           <a:prstGeom prst="rect">
@@ -5490,10 +5537,46 @@
           </a:p>
         </p:txBody>
       </p:sp>
+      <p:sp>
+        <p:nvSpPr>
+          <p:cNvPr id="4" name="Divider">
+            <a:extLst>
+              <a:ext uri="{FF2B5EF4-FFF2-40B4-BE49-F238E27FC236}">
+                <a16:creationId xmlns:a16="http://schemas.microsoft.com/office/drawing/2014/main" id="{1DB18C59-E742-67AF-103A-606E0814A8E8}"/>
+              </a:ext>
+            </a:extLst>
+          </p:cNvPr>
+          <p:cNvSpPr/>
+          <p:nvPr/>
+        </p:nvSpPr>
+        <p:spPr>
+          <a:xfrm>
+            <a:off x="288290" y="4101844"/>
+            <a:ext cx="6426200" cy="0"/>
+          </a:xfrm>
+          <a:prstGeom prst="line">
+            <a:avLst/>
+          </a:prstGeom>
+          <a:noFill/>
+          <a:ln w="10795">
+            <a:solidFill>
+              <a:srgbClr val="DFE2E3"/>
+            </a:solidFill>
+            <a:prstDash val="solid"/>
+          </a:ln>
+        </p:spPr>
+        <p:txBody>
+          <a:bodyPr/>
+          <a:lstStyle/>
+          <a:p>
+            <a:endParaRPr lang="LID4096"/>
+          </a:p>
+        </p:txBody>
+      </p:sp>
     </p:spTree>
     <p:extLst>
       <p:ext uri="{BB962C8B-B14F-4D97-AF65-F5344CB8AC3E}">
-        <p14:creationId xmlns:p14="http://schemas.microsoft.com/office/powerpoint/2010/main" val="2590347268"/>
+        <p14:creationId xmlns:p14="http://schemas.microsoft.com/office/powerpoint/2010/main" val="1429018327"/>
       </p:ext>
     </p:extLst>
   </p:cSld>
@@ -5504,7 +5587,7 @@
 </file>
 
 <file path=ppt/theme/theme1.xml><?xml version="1.0" encoding="utf-8"?>
-<a:theme xmlns:a="http://schemas.openxmlformats.org/drawingml/2006/main" name="Office Theme">
+<a:theme xmlns:a="http://schemas.openxmlformats.org/drawingml/2006/main" name="02-introduction">
   <a:themeElements>
     <a:clrScheme name="Office Theme">
       <a:dk1>
